--- a/HXY_CV1711_W1-3.pptx
+++ b/HXY_CV1711_W1-3.pptx
@@ -142,7 +142,7 @@
 <p1510:revInfo xmlns:a="http://schemas.openxmlformats.org/drawingml/2006/main" xmlns:r="http://schemas.openxmlformats.org/officeDocument/2006/relationships" xmlns:p1510="http://schemas.microsoft.com/office/powerpoint/2015/10/main">
   <p1510:revLst>
     <p1510:client id="{5AA85204-A04B-4338-900D-92527097F1DC}" v="6" dt="2026-08-08T06:03:15.953"/>
-    <p1510:client id="{D675B71C-9BB4-4E2E-B89A-70B871808510}" v="90" dt="2026-08-08T06:45:05.685"/>
+    <p1510:client id="{D675B71C-9BB4-4E2E-B89A-70B871808510}" v="95" dt="2026-08-08T07:00:32.664"/>
   </p1510:revLst>
 </p1510:revInfo>
 </file>
@@ -152,7 +152,7 @@
   <pc:docChgLst>
     <pc:chgData name="#HUANG XINYA#" userId="0394e048-be67-4ff5-b348-88acdc9df0d1" providerId="ADAL" clId="{02486B59-77C2-44D9-86E4-77A6D6D6742A}"/>
     <pc:docChg chg="undo redo custSel addSld delSld modSld sldOrd">
-      <pc:chgData name="#HUANG XINYA#" userId="0394e048-be67-4ff5-b348-88acdc9df0d1" providerId="ADAL" clId="{02486B59-77C2-44D9-86E4-77A6D6D6742A}" dt="2026-08-08T06:50:41.673" v="16231" actId="47"/>
+      <pc:chgData name="#HUANG XINYA#" userId="0394e048-be67-4ff5-b348-88acdc9df0d1" providerId="ADAL" clId="{02486B59-77C2-44D9-86E4-77A6D6D6742A}" dt="2026-08-08T07:02:11.462" v="16279" actId="14100"/>
       <pc:docMkLst>
         <pc:docMk/>
       </pc:docMkLst>
@@ -774,12 +774,108 @@
           <pc:sldMk cId="3680816183" sldId="331"/>
         </pc:sldMkLst>
       </pc:sldChg>
-      <pc:sldChg chg="add modNotesTx">
-        <pc:chgData name="#HUANG XINYA#" userId="0394e048-be67-4ff5-b348-88acdc9df0d1" providerId="ADAL" clId="{02486B59-77C2-44D9-86E4-77A6D6D6742A}" dt="2026-08-08T05:57:56.529" v="16014" actId="20577"/>
+      <pc:sldChg chg="addSp delSp modSp add mod modNotesTx">
+        <pc:chgData name="#HUANG XINYA#" userId="0394e048-be67-4ff5-b348-88acdc9df0d1" providerId="ADAL" clId="{02486B59-77C2-44D9-86E4-77A6D6D6742A}" dt="2026-08-08T07:02:11.462" v="16279" actId="14100"/>
         <pc:sldMkLst>
           <pc:docMk/>
           <pc:sldMk cId="987049720" sldId="332"/>
         </pc:sldMkLst>
+        <pc:spChg chg="mod">
+          <ac:chgData name="#HUANG XINYA#" userId="0394e048-be67-4ff5-b348-88acdc9df0d1" providerId="ADAL" clId="{02486B59-77C2-44D9-86E4-77A6D6D6742A}" dt="2026-08-08T07:02:09.818" v="16278" actId="14100"/>
+          <ac:spMkLst>
+            <pc:docMk/>
+            <pc:sldMk cId="987049720" sldId="332"/>
+            <ac:spMk id="16" creationId="{7E0F29FD-C5C8-23F9-EA3F-D17CCFB0B60B}"/>
+          </ac:spMkLst>
+        </pc:spChg>
+        <pc:spChg chg="mod">
+          <ac:chgData name="#HUANG XINYA#" userId="0394e048-be67-4ff5-b348-88acdc9df0d1" providerId="ADAL" clId="{02486B59-77C2-44D9-86E4-77A6D6D6742A}" dt="2026-08-08T07:01:19.062" v="16270" actId="1076"/>
+          <ac:spMkLst>
+            <pc:docMk/>
+            <pc:sldMk cId="987049720" sldId="332"/>
+            <ac:spMk id="19" creationId="{9B088EBD-1777-E072-C48A-7B3EB1AD8169}"/>
+          </ac:spMkLst>
+        </pc:spChg>
+        <pc:picChg chg="add mod ord">
+          <ac:chgData name="#HUANG XINYA#" userId="0394e048-be67-4ff5-b348-88acdc9df0d1" providerId="ADAL" clId="{02486B59-77C2-44D9-86E4-77A6D6D6742A}" dt="2026-08-08T07:00:58.800" v="16263" actId="1076"/>
+          <ac:picMkLst>
+            <pc:docMk/>
+            <pc:sldMk cId="987049720" sldId="332"/>
+            <ac:picMk id="3" creationId="{2519DC58-D837-9D48-A223-711F461AA8B1}"/>
+          </ac:picMkLst>
+        </pc:picChg>
+        <pc:picChg chg="del">
+          <ac:chgData name="#HUANG XINYA#" userId="0394e048-be67-4ff5-b348-88acdc9df0d1" providerId="ADAL" clId="{02486B59-77C2-44D9-86E4-77A6D6D6742A}" dt="2026-08-08T06:54:42.152" v="16232" actId="478"/>
+          <ac:picMkLst>
+            <pc:docMk/>
+            <pc:sldMk cId="987049720" sldId="332"/>
+            <ac:picMk id="4" creationId="{D8A208E8-88EE-0401-B957-FAFE5152721F}"/>
+          </ac:picMkLst>
+        </pc:picChg>
+        <pc:picChg chg="add mod ord modCrop">
+          <ac:chgData name="#HUANG XINYA#" userId="0394e048-be67-4ff5-b348-88acdc9df0d1" providerId="ADAL" clId="{02486B59-77C2-44D9-86E4-77A6D6D6742A}" dt="2026-08-08T07:01:09.013" v="16267" actId="1076"/>
+          <ac:picMkLst>
+            <pc:docMk/>
+            <pc:sldMk cId="987049720" sldId="332"/>
+            <ac:picMk id="6" creationId="{E507BD24-5ADA-1150-79D0-B6EDC5FD77EC}"/>
+          </ac:picMkLst>
+        </pc:picChg>
+        <pc:picChg chg="add mod">
+          <ac:chgData name="#HUANG XINYA#" userId="0394e048-be67-4ff5-b348-88acdc9df0d1" providerId="ADAL" clId="{02486B59-77C2-44D9-86E4-77A6D6D6742A}" dt="2026-08-08T07:00:25.622" v="16250"/>
+          <ac:picMkLst>
+            <pc:docMk/>
+            <pc:sldMk cId="987049720" sldId="332"/>
+            <ac:picMk id="7" creationId="{2FD8681E-0AD1-B1B4-BD34-4731C02799E3}"/>
+          </ac:picMkLst>
+        </pc:picChg>
+        <pc:picChg chg="del">
+          <ac:chgData name="#HUANG XINYA#" userId="0394e048-be67-4ff5-b348-88acdc9df0d1" providerId="ADAL" clId="{02486B59-77C2-44D9-86E4-77A6D6D6742A}" dt="2026-08-08T06:59:43.760" v="16238" actId="478"/>
+          <ac:picMkLst>
+            <pc:docMk/>
+            <pc:sldMk cId="987049720" sldId="332"/>
+            <ac:picMk id="9" creationId="{FAB10BA0-EBCE-1EED-CBA4-2E5185D4F429}"/>
+          </ac:picMkLst>
+        </pc:picChg>
+        <pc:picChg chg="add mod ord modCrop">
+          <ac:chgData name="#HUANG XINYA#" userId="0394e048-be67-4ff5-b348-88acdc9df0d1" providerId="ADAL" clId="{02486B59-77C2-44D9-86E4-77A6D6D6742A}" dt="2026-08-08T07:01:15.108" v="16269" actId="167"/>
+          <ac:picMkLst>
+            <pc:docMk/>
+            <pc:sldMk cId="987049720" sldId="332"/>
+            <ac:picMk id="10" creationId="{EE9430D9-C363-3DAC-53C7-736738E91F46}"/>
+          </ac:picMkLst>
+        </pc:picChg>
+        <pc:picChg chg="del">
+          <ac:chgData name="#HUANG XINYA#" userId="0394e048-be67-4ff5-b348-88acdc9df0d1" providerId="ADAL" clId="{02486B59-77C2-44D9-86E4-77A6D6D6742A}" dt="2026-08-08T06:59:45.040" v="16239" actId="478"/>
+          <ac:picMkLst>
+            <pc:docMk/>
+            <pc:sldMk cId="987049720" sldId="332"/>
+            <ac:picMk id="11" creationId="{95E12AC2-DC1D-74EF-82B9-EB78F1266F7F}"/>
+          </ac:picMkLst>
+        </pc:picChg>
+        <pc:cxnChg chg="mod">
+          <ac:chgData name="#HUANG XINYA#" userId="0394e048-be67-4ff5-b348-88acdc9df0d1" providerId="ADAL" clId="{02486B59-77C2-44D9-86E4-77A6D6D6742A}" dt="2026-08-08T07:01:09.013" v="16267" actId="1076"/>
+          <ac:cxnSpMkLst>
+            <pc:docMk/>
+            <pc:sldMk cId="987049720" sldId="332"/>
+            <ac:cxnSpMk id="12" creationId="{3A1266E3-78EA-F711-3D66-742DA96A4E23}"/>
+          </ac:cxnSpMkLst>
+        </pc:cxnChg>
+        <pc:cxnChg chg="mod">
+          <ac:chgData name="#HUANG XINYA#" userId="0394e048-be67-4ff5-b348-88acdc9df0d1" providerId="ADAL" clId="{02486B59-77C2-44D9-86E4-77A6D6D6742A}" dt="2026-08-08T07:02:11.462" v="16279" actId="14100"/>
+          <ac:cxnSpMkLst>
+            <pc:docMk/>
+            <pc:sldMk cId="987049720" sldId="332"/>
+            <ac:cxnSpMk id="17" creationId="{6CD26AAB-4A93-9ECB-14BE-61E6F44E5164}"/>
+          </ac:cxnSpMkLst>
+        </pc:cxnChg>
+        <pc:cxnChg chg="mod">
+          <ac:chgData name="#HUANG XINYA#" userId="0394e048-be67-4ff5-b348-88acdc9df0d1" providerId="ADAL" clId="{02486B59-77C2-44D9-86E4-77A6D6D6742A}" dt="2026-08-08T07:01:21.504" v="16271" actId="1076"/>
+          <ac:cxnSpMkLst>
+            <pc:docMk/>
+            <pc:sldMk cId="987049720" sldId="332"/>
+            <ac:cxnSpMk id="21" creationId="{F3545CA8-659F-6416-28CF-C6D29B01723D}"/>
+          </ac:cxnSpMkLst>
+        </pc:cxnChg>
       </pc:sldChg>
       <pc:sldChg chg="modSp add del mod modNotesTx">
         <pc:chgData name="#HUANG XINYA#" userId="0394e048-be67-4ff5-b348-88acdc9df0d1" providerId="ADAL" clId="{02486B59-77C2-44D9-86E4-77A6D6D6742A}" dt="2026-08-08T06:50:41.673" v="16231" actId="47"/>
@@ -9638,6 +9734,98 @@
           <a:chExt cx="0" cy="0"/>
         </a:xfrm>
       </p:grpSpPr>
+      <p:pic>
+        <p:nvPicPr>
+          <p:cNvPr id="10" name="Picture 9">
+            <a:extLst>
+              <a:ext uri="{FF2B5EF4-FFF2-40B4-BE49-F238E27FC236}">
+                <a16:creationId xmlns:a16="http://schemas.microsoft.com/office/drawing/2014/main" id="{EE9430D9-C363-3DAC-53C7-736738E91F46}"/>
+              </a:ext>
+            </a:extLst>
+          </p:cNvPr>
+          <p:cNvPicPr>
+            <a:picLocks noChangeAspect="1"/>
+          </p:cNvPicPr>
+          <p:nvPr/>
+        </p:nvPicPr>
+        <p:blipFill>
+          <a:blip r:embed="rId3"/>
+          <a:srcRect t="13207" b="12242"/>
+          <a:stretch>
+            <a:fillRect/>
+          </a:stretch>
+        </p:blipFill>
+        <p:spPr>
+          <a:xfrm>
+            <a:off x="6621718" y="597223"/>
+            <a:ext cx="2372530" cy="3834560"/>
+          </a:xfrm>
+          <a:prstGeom prst="rect">
+            <a:avLst/>
+          </a:prstGeom>
+        </p:spPr>
+      </p:pic>
+      <p:pic>
+        <p:nvPicPr>
+          <p:cNvPr id="6" name="Picture 5">
+            <a:extLst>
+              <a:ext uri="{FF2B5EF4-FFF2-40B4-BE49-F238E27FC236}">
+                <a16:creationId xmlns:a16="http://schemas.microsoft.com/office/drawing/2014/main" id="{E507BD24-5ADA-1150-79D0-B6EDC5FD77EC}"/>
+              </a:ext>
+            </a:extLst>
+          </p:cNvPr>
+          <p:cNvPicPr>
+            <a:picLocks noChangeAspect="1"/>
+          </p:cNvPicPr>
+          <p:nvPr/>
+        </p:nvPicPr>
+        <p:blipFill>
+          <a:blip r:embed="rId4"/>
+          <a:srcRect t="12242" b="14171"/>
+          <a:stretch>
+            <a:fillRect/>
+          </a:stretch>
+        </p:blipFill>
+        <p:spPr>
+          <a:xfrm>
+            <a:off x="3783841" y="622032"/>
+            <a:ext cx="2372530" cy="3784941"/>
+          </a:xfrm>
+          <a:prstGeom prst="rect">
+            <a:avLst/>
+          </a:prstGeom>
+        </p:spPr>
+      </p:pic>
+      <p:pic>
+        <p:nvPicPr>
+          <p:cNvPr id="3" name="Picture 2">
+            <a:extLst>
+              <a:ext uri="{FF2B5EF4-FFF2-40B4-BE49-F238E27FC236}">
+                <a16:creationId xmlns:a16="http://schemas.microsoft.com/office/drawing/2014/main" id="{2519DC58-D837-9D48-A223-711F461AA8B1}"/>
+              </a:ext>
+            </a:extLst>
+          </p:cNvPr>
+          <p:cNvPicPr>
+            <a:picLocks noChangeAspect="1"/>
+          </p:cNvPicPr>
+          <p:nvPr/>
+        </p:nvPicPr>
+        <p:blipFill>
+          <a:blip r:embed="rId5"/>
+          <a:stretch>
+            <a:fillRect/>
+          </a:stretch>
+        </p:blipFill>
+        <p:spPr>
+          <a:xfrm>
+            <a:off x="149752" y="938342"/>
+            <a:ext cx="3537210" cy="3537210"/>
+          </a:xfrm>
+          <a:prstGeom prst="rect">
+            <a:avLst/>
+          </a:prstGeom>
+        </p:spPr>
+      </p:pic>
       <p:sp>
         <p:nvSpPr>
           <p:cNvPr id="2" name="TextBox 1">
@@ -9717,96 +9905,6 @@
           </a:p>
         </p:txBody>
       </p:sp>
-      <p:pic>
-        <p:nvPicPr>
-          <p:cNvPr id="4" name="Picture 3" descr="A qr code with a dinosaur&#10;&#10;AI-generated content may be incorrect.">
-            <a:extLst>
-              <a:ext uri="{FF2B5EF4-FFF2-40B4-BE49-F238E27FC236}">
-                <a16:creationId xmlns:a16="http://schemas.microsoft.com/office/drawing/2014/main" id="{D8A208E8-88EE-0401-B957-FAFE5152721F}"/>
-              </a:ext>
-            </a:extLst>
-          </p:cNvPr>
-          <p:cNvPicPr>
-            <a:picLocks noChangeAspect="1"/>
-          </p:cNvPicPr>
-          <p:nvPr/>
-        </p:nvPicPr>
-        <p:blipFill>
-          <a:blip r:embed="rId3"/>
-          <a:stretch>
-            <a:fillRect/>
-          </a:stretch>
-        </p:blipFill>
-        <p:spPr>
-          <a:xfrm>
-            <a:off x="140481" y="867424"/>
-            <a:ext cx="3756490" cy="3756490"/>
-          </a:xfrm>
-          <a:prstGeom prst="rect">
-            <a:avLst/>
-          </a:prstGeom>
-        </p:spPr>
-      </p:pic>
-      <p:pic>
-        <p:nvPicPr>
-          <p:cNvPr id="9" name="Picture 8" descr="A screenshot of a computer&#10;&#10;AI-generated content may be incorrect.">
-            <a:extLst>
-              <a:ext uri="{FF2B5EF4-FFF2-40B4-BE49-F238E27FC236}">
-                <a16:creationId xmlns:a16="http://schemas.microsoft.com/office/drawing/2014/main" id="{FAB10BA0-EBCE-1EED-CBA4-2E5185D4F429}"/>
-              </a:ext>
-            </a:extLst>
-          </p:cNvPr>
-          <p:cNvPicPr>
-            <a:picLocks noChangeAspect="1"/>
-          </p:cNvPicPr>
-          <p:nvPr/>
-        </p:nvPicPr>
-        <p:blipFill>
-          <a:blip r:embed="rId4"/>
-          <a:stretch>
-            <a:fillRect/>
-          </a:stretch>
-        </p:blipFill>
-        <p:spPr>
-          <a:xfrm>
-            <a:off x="4358895" y="691661"/>
-            <a:ext cx="1889099" cy="4107144"/>
-          </a:xfrm>
-          <a:prstGeom prst="rect">
-            <a:avLst/>
-          </a:prstGeom>
-        </p:spPr>
-      </p:pic>
-      <p:pic>
-        <p:nvPicPr>
-          <p:cNvPr id="11" name="Picture 10" descr="A screenshot of a chat&#10;&#10;AI-generated content may be incorrect.">
-            <a:extLst>
-              <a:ext uri="{FF2B5EF4-FFF2-40B4-BE49-F238E27FC236}">
-                <a16:creationId xmlns:a16="http://schemas.microsoft.com/office/drawing/2014/main" id="{95E12AC2-DC1D-74EF-82B9-EB78F1266F7F}"/>
-              </a:ext>
-            </a:extLst>
-          </p:cNvPr>
-          <p:cNvPicPr>
-            <a:picLocks noChangeAspect="1"/>
-          </p:cNvPicPr>
-          <p:nvPr/>
-        </p:nvPicPr>
-        <p:blipFill>
-          <a:blip r:embed="rId5"/>
-          <a:stretch>
-            <a:fillRect/>
-          </a:stretch>
-        </p:blipFill>
-        <p:spPr>
-          <a:xfrm>
-            <a:off x="6826121" y="691661"/>
-            <a:ext cx="1889099" cy="4107144"/>
-          </a:xfrm>
-          <a:prstGeom prst="rect">
-            <a:avLst/>
-          </a:prstGeom>
-        </p:spPr>
-      </p:pic>
       <p:cxnSp>
         <p:nvCxnSpPr>
           <p:cNvPr id="12" name="Straight Arrow Connector 11">
@@ -9818,13 +9916,14 @@
           </p:cNvPr>
           <p:cNvCxnSpPr>
             <a:cxnSpLocks/>
+            <a:endCxn id="6" idx="1"/>
           </p:cNvCxnSpPr>
           <p:nvPr/>
         </p:nvCxnSpPr>
         <p:spPr>
-          <a:xfrm flipV="1">
-            <a:off x="3777286" y="1321332"/>
-            <a:ext cx="651091" cy="550555"/>
+          <a:xfrm>
+            <a:off x="3474611" y="2137766"/>
+            <a:ext cx="309230" cy="376737"/>
           </a:xfrm>
           <a:prstGeom prst="straightConnector1">
             <a:avLst/>
@@ -9865,8 +9964,8 @@
         </p:nvSpPr>
         <p:spPr>
           <a:xfrm>
-            <a:off x="4428377" y="3044808"/>
-            <a:ext cx="1780926" cy="186710"/>
+            <a:off x="3938761" y="2514501"/>
+            <a:ext cx="2072295" cy="251183"/>
           </a:xfrm>
           <a:prstGeom prst="rect">
             <a:avLst/>
@@ -9946,8 +10045,8 @@
         </p:nvCxnSpPr>
         <p:spPr>
           <a:xfrm flipV="1">
-            <a:off x="6209303" y="2355418"/>
-            <a:ext cx="694178" cy="703058"/>
+            <a:off x="5782614" y="2137766"/>
+            <a:ext cx="839104" cy="376735"/>
           </a:xfrm>
           <a:prstGeom prst="straightConnector1">
             <a:avLst/>
@@ -9988,7 +10087,7 @@
         </p:nvSpPr>
         <p:spPr>
           <a:xfrm>
-            <a:off x="7343925" y="3561053"/>
+            <a:off x="7456124" y="4040738"/>
             <a:ext cx="1259095" cy="186710"/>
           </a:xfrm>
           <a:prstGeom prst="rect">
@@ -10069,7 +10168,7 @@
         </p:nvCxnSpPr>
         <p:spPr>
           <a:xfrm flipH="1">
-            <a:off x="8557234" y="3138163"/>
+            <a:off x="8309896" y="3527907"/>
             <a:ext cx="315971" cy="425283"/>
           </a:xfrm>
           <a:prstGeom prst="straightConnector1">
@@ -11534,6 +11633,24 @@
 </file>
 
 <file path=customXml/item1.xml><?xml version="1.0" encoding="utf-8"?>
+<?mso-contentType ?>
+<FormTemplates xmlns="http://schemas.microsoft.com/sharepoint/v3/contenttype/forms">
+  <Display>DocumentLibraryForm</Display>
+  <Edit>DocumentLibraryForm</Edit>
+  <New>DocumentLibraryForm</New>
+</FormTemplates>
+</file>
+
+<file path=customXml/item2.xml><?xml version="1.0" encoding="utf-8"?>
+<p:properties xmlns:p="http://schemas.microsoft.com/office/2006/metadata/properties" xmlns:xsi="http://www.w3.org/2001/XMLSchema-instance" xmlns:pc="http://schemas.microsoft.com/office/infopath/2007/PartnerControls">
+  <documentManagement>
+    <PublishingExpirationDate xmlns="http://schemas.microsoft.com/sharepoint/v3" xsi:nil="true"/>
+    <PublishingStartDate xmlns="http://schemas.microsoft.com/sharepoint/v3" xsi:nil="true"/>
+  </documentManagement>
+</p:properties>
+</file>
+
+<file path=customXml/item3.xml><?xml version="1.0" encoding="utf-8"?>
 <ct:contentTypeSchema xmlns:ct="http://schemas.microsoft.com/office/2006/metadata/contentType" xmlns:ma="http://schemas.microsoft.com/office/2006/metadata/properties/metaAttributes" ct:_="" ma:_="" ma:contentTypeName="Document" ma:contentTypeID="0x010100E28E816AC679FF4C86C22834E825BD05" ma:contentTypeVersion="1" ma:contentTypeDescription="Create a new document." ma:contentTypeScope="" ma:versionID="066e42d507d75a122d0db91dd470f30a">
   <xsd:schema xmlns:xsd="http://www.w3.org/2001/XMLSchema" xmlns:xs="http://www.w3.org/2001/XMLSchema" xmlns:p="http://schemas.microsoft.com/office/2006/metadata/properties" xmlns:ns1="http://schemas.microsoft.com/sharepoint/v3" targetNamespace="http://schemas.microsoft.com/office/2006/metadata/properties" ma:root="true" ma:fieldsID="48c5b5cd9b8d25ff6dd15848836f4270" ns1:_="">
     <xsd:import namespace="http://schemas.microsoft.com/sharepoint/v3"/>
@@ -11665,25 +11782,25 @@
 </ct:contentTypeSchema>
 </file>
 
-<file path=customXml/item2.xml><?xml version="1.0" encoding="utf-8"?>
-<p:properties xmlns:p="http://schemas.microsoft.com/office/2006/metadata/properties" xmlns:xsi="http://www.w3.org/2001/XMLSchema-instance" xmlns:pc="http://schemas.microsoft.com/office/infopath/2007/PartnerControls">
-  <documentManagement>
-    <PublishingExpirationDate xmlns="http://schemas.microsoft.com/sharepoint/v3" xsi:nil="true"/>
-    <PublishingStartDate xmlns="http://schemas.microsoft.com/sharepoint/v3" xsi:nil="true"/>
-  </documentManagement>
-</p:properties>
+<file path=customXml/itemProps1.xml><?xml version="1.0" encoding="utf-8"?>
+<ds:datastoreItem xmlns:ds="http://schemas.openxmlformats.org/officeDocument/2006/customXml" ds:itemID="{6CCB8030-6F99-446F-BD3B-E5E3F435F1FD}">
+  <ds:schemaRefs>
+    <ds:schemaRef ds:uri="http://schemas.microsoft.com/sharepoint/v3/contenttype/forms"/>
+  </ds:schemaRefs>
+</ds:datastoreItem>
 </file>
 
-<file path=customXml/item3.xml><?xml version="1.0" encoding="utf-8"?>
-<?mso-contentType ?>
-<FormTemplates xmlns="http://schemas.microsoft.com/sharepoint/v3/contenttype/forms">
-  <Display>DocumentLibraryForm</Display>
-  <Edit>DocumentLibraryForm</Edit>
-  <New>DocumentLibraryForm</New>
-</FormTemplates>
+<file path=customXml/itemProps2.xml><?xml version="1.0" encoding="utf-8"?>
+<ds:datastoreItem xmlns:ds="http://schemas.openxmlformats.org/officeDocument/2006/customXml" ds:itemID="{264D3FE7-A0C8-4453-A806-BCAD6F53B901}">
+  <ds:schemaRefs>
+    <ds:schemaRef ds:uri="http://schemas.microsoft.com/office/2006/metadata/properties"/>
+    <ds:schemaRef ds:uri="http://schemas.microsoft.com/office/infopath/2007/PartnerControls"/>
+    <ds:schemaRef ds:uri="http://schemas.microsoft.com/sharepoint/v3"/>
+  </ds:schemaRefs>
+</ds:datastoreItem>
 </file>
 
-<file path=customXml/itemProps1.xml><?xml version="1.0" encoding="utf-8"?>
+<file path=customXml/itemProps3.xml><?xml version="1.0" encoding="utf-8"?>
 <ds:datastoreItem xmlns:ds="http://schemas.openxmlformats.org/officeDocument/2006/customXml" ds:itemID="{AFA540F8-4ACB-4DC8-920F-A3CE5A42B988}">
   <ds:schemaRefs>
     <ds:schemaRef ds:uri="http://purl.org/dc/elements/1.1/"/>
@@ -11701,24 +11818,6 @@
 </ds:datastoreItem>
 </file>
 
-<file path=customXml/itemProps2.xml><?xml version="1.0" encoding="utf-8"?>
-<ds:datastoreItem xmlns:ds="http://schemas.openxmlformats.org/officeDocument/2006/customXml" ds:itemID="{264D3FE7-A0C8-4453-A806-BCAD6F53B901}">
-  <ds:schemaRefs>
-    <ds:schemaRef ds:uri="http://schemas.microsoft.com/office/2006/metadata/properties"/>
-    <ds:schemaRef ds:uri="http://schemas.microsoft.com/office/infopath/2007/PartnerControls"/>
-    <ds:schemaRef ds:uri="http://schemas.microsoft.com/sharepoint/v3"/>
-  </ds:schemaRefs>
-</ds:datastoreItem>
-</file>
-
-<file path=customXml/itemProps3.xml><?xml version="1.0" encoding="utf-8"?>
-<ds:datastoreItem xmlns:ds="http://schemas.openxmlformats.org/officeDocument/2006/customXml" ds:itemID="{6CCB8030-6F99-446F-BD3B-E5E3F435F1FD}">
-  <ds:schemaRefs>
-    <ds:schemaRef ds:uri="http://schemas.microsoft.com/sharepoint/v3/contenttype/forms"/>
-  </ds:schemaRefs>
-</ds:datastoreItem>
-</file>
-
 <file path=docMetadata/LabelInfo.xml><?xml version="1.0" encoding="utf-8"?>
 <clbl:labelList xmlns:clbl="http://schemas.microsoft.com/office/2020/mipLabelMetadata">
   <clbl:label id="{15ce9348-be2a-462b-8fc0-e1765a9b204a}" enabled="0" method="" siteId="{15ce9348-be2a-462b-8fc0-e1765a9b204a}" removed="1"/>
